--- a/resources/a-level-business-evaluation-which-sentence-earns-which-mark/A-Level-Business-Evaluation-Which-Sentence-Earns-Which-Mark-Slides.pptx
+++ b/resources/a-level-business-evaluation-which-sentence-earns-which-mark/A-Level-Business-Evaluation-Which-Sentence-Earns-Which-Mark-Slides.pptx
@@ -40,6 +40,7 @@
     <p:sldId id="288" r:id="rId39"/>
     <p:sldId id="289" r:id="rId40"/>
     <p:sldId id="290" r:id="rId41"/>
+    <p:sldId id="291" r:id="rId42"/>
   </p:sldIdLst>
   <p:sldSz cx="12191695" cy="6858000" type="screen4x3"/>
   <p:notesSz cx="6858000" cy="9144000"/>
@@ -3258,6 +3259,22 @@
               <a:t>AQA 7132 and Edexcel 9BS0. Four lessons, three annotated model answers.</a:t>
             </a:r>
           </a:p>
+          <a:p>
+            <a:pPr algn="l">
+              <a:spcAft>
+                <a:spcPts val="700"/>
+              </a:spcAft>
+            </a:pPr>
+            <a:r>
+              <a:rPr sz="1600" b="0">
+                <a:solidFill>
+                  <a:srgbClr val="6B6B6B"/>
+                </a:solidFill>
+                <a:latin typeface="Arial"/>
+              </a:rPr>
+              <a:t>For a Year 12 starting September 2026 or later, see the AQA 7138 slide and the 7138 section of the pack.</a:t>
+            </a:r>
+          </a:p>
         </p:txBody>
       </p:sp>
       <p:sp>
@@ -4317,7 +4334,7 @@
                 </a:solidFill>
                 <a:latin typeface="Arial"/>
               </a:rPr>
-              <a:t>2.  K   True, and the term is used correctly, but there is no figure and no consequence. Nothing here is specific to Verity, so it fails the application test. The case gives £0.6 million, and using it would earn AP and AN as well.</a:t>
+              <a:t>2.  K   True, and the term is used correctly, but there is no figure and no consequence. Nothing here is specific to Verity, so it fails the application test. The figure is £0.6 million, and using it would earn AP and AN as well.</a:t>
             </a:r>
           </a:p>
           <a:p>
@@ -4349,7 +4366,7 @@
                 </a:solidFill>
                 <a:latin typeface="Arial"/>
               </a:rPr>
-              <a:t>4.  K   Asserted, not developed and not tied to Verity. Nothing in the case suggests brand damage, so this is imported from a textbook.</a:t>
+              <a:t>4.  K   Asserted, not developed and not tied to Verity. Nothing in the evidence suggests brand damage, so this is imported from a textbook.</a:t>
             </a:r>
           </a:p>
           <a:p>
@@ -4748,7 +4765,7 @@
                 </a:solidFill>
                 <a:latin typeface="Arial"/>
               </a:rPr>
-              <a:t>9.  Weak revenue is not the same thing as weak contribution, and the case gives revenue only.</a:t>
+              <a:t>9.  Weak revenue is not the same thing as weak contribution, and revenue is all that is reported site by site.</a:t>
             </a:r>
           </a:p>
           <a:p>
@@ -5117,7 +5134,7 @@
                 </a:solidFill>
                 <a:latin typeface="Arial"/>
               </a:rPr>
-              <a:t>1.  K + AP   Two figures from the case, used to establish that the problem is genuine. Opening with evidence rather than with a definition is worth copying.</a:t>
+              <a:t>1.  K + AP   Two figures from the business the student has studied, used to establish that the problem is genuine. Remember that AQA gives no data with this question, so every number here is one the student brought. Opening with evidence rather than with a definition is worth copying.</a:t>
             </a:r>
           </a:p>
           <a:p>
@@ -5245,7 +5262,7 @@
                 </a:solidFill>
                 <a:latin typeface="Arial"/>
               </a:rPr>
-              <a:t>9.  K + EV   Challenges the quality of the evidence rather than adding another point. Interrogating the data you have been given is the kind of move that separates answers at the top.</a:t>
+              <a:t>9.  K + EV   Challenges the quality of the evidence rather than adding another point. Interrogating the evidence you are relying on, instead of piling on one more argument, is the kind of move that separates answers at the top.</a:t>
             </a:r>
           </a:p>
           <a:p>
@@ -5309,7 +5326,7 @@
                 </a:solidFill>
                 <a:latin typeface="Arial"/>
               </a:rPr>
-              <a:t>13.  AP + AN   Two calculations from the case supporting the reframe. Notice the judgement in sentence 12 came first and the evidence follows immediately. Either order works, but they must be adjacent.</a:t>
+              <a:t>13.  AP + AN   Two calculations supporting the reframe. Notice the judgement in sentence 12 came first and the evidence follows immediately. Either order works, but they must be adjacent.</a:t>
             </a:r>
           </a:p>
           <a:p>
@@ -5357,7 +5374,7 @@
                 </a:solidFill>
                 <a:latin typeface="Arial"/>
               </a:rPr>
-              <a:t>16.  EV   A next step that is proportionate to the risk. This is what justify your view asks for beyond the decision itself.</a:t>
+              <a:t>16.  EV   A next step that is proportionate to the risk. To what extent asks how far, not only whether, and naming what the business should do next is how an answer shows it has gone past a yes or a no.</a:t>
             </a:r>
           </a:p>
           <a:p>
@@ -5612,7 +5629,7 @@
                 </a:solidFill>
                 <a:latin typeface="Arial"/>
               </a:rPr>
-              <a:t>1.  The scheme cannibalises existing sales: it replaces £19.20 of monthly coffee revenue from an average customer with a flat £15, so before anything else happens Verity gives up £4.20 a month per subscriber.</a:t>
+              <a:t>1.  Verity should launch the subscription rather than close the 20 weakest sites, because only one of these two options can be undone.</a:t>
             </a:r>
           </a:p>
           <a:p>
@@ -5628,7 +5645,7 @@
                 </a:solidFill>
                 <a:latin typeface="Arial"/>
               </a:rPr>
-              <a:t>2.  The trial suggests that is not the whole story, because subscribers visited 11 times a month against a normal 6.</a:t>
+              <a:t>2.  The criterion is the one the board set, the operating profit margin, which has fallen from 9.0 to 5.0 per cent, and behind it the cash available to buy that recovery.</a:t>
             </a:r>
           </a:p>
           <a:p>
@@ -5644,7 +5661,7 @@
                 </a:solidFill>
                 <a:latin typeface="Arial"/>
               </a:rPr>
-              <a:t>3.  Those extra visits cost almost nothing to serve, because at £0.35 a cup 11 visits cost Verity £3.85.</a:t>
+              <a:t>3.  Closure is the option that looks decisive: removing the £0.6 million combined operating loss lifts group operating profit from £4.8 million to £5.4 million, and margin from 5.0 to about 6.3 per cent once the £9.6 million of revenue goes with it.</a:t>
             </a:r>
           </a:p>
           <a:p>
@@ -5660,7 +5677,7 @@
                 </a:solidFill>
                 <a:latin typeface="Arial"/>
               </a:rPr>
-              <a:t>4.  The scheme only becomes loss making on coffee cost alone at about 43 visits a month, which no customer will reach.</a:t>
+              <a:t>4.  Getting there costs £3.6 million at £180,000 a site, which is a six year payback on the loss it removes.</a:t>
             </a:r>
           </a:p>
           <a:p>
@@ -5676,7 +5693,7 @@
                 </a:solidFill>
                 <a:latin typeface="Arial"/>
               </a:rPr>
-              <a:t>5.  So the risk is not the cost of the coffee but the revenue the customer used to pay, and on the trial numbers that is enough to make the scheme marginal at best.</a:t>
+              <a:t>5.  Six years is the wrong length of time for a business whose margin fell by more than 40 per cent in a single year, and the leases on those sites run for up to nine.</a:t>
             </a:r>
           </a:p>
           <a:p>
@@ -5692,7 +5709,7 @@
                 </a:solidFill>
                 <a:latin typeface="Arial"/>
               </a:rPr>
-              <a:t>6.  On the trial numbers coffee contribution per customer falls from £17.10 a month to £11.15, a loss of £5.95.</a:t>
+              <a:t>6.  The subscription looks worse on first inspection, because a customer visiting six times a month at £3.20 a cup pays £19.20, and a £15 subscription hands £4.20 of that straight back.</a:t>
             </a:r>
           </a:p>
           <a:p>
@@ -5708,7 +5725,7 @@
                 </a:solidFill>
                 <a:latin typeface="Arial"/>
               </a:rPr>
-              <a:t>7.  Food is where that £5.95 has to come back.</a:t>
+              <a:t>7.  That is the wrong worry: at £0.35 a cup even 11 visits cost Verity £3.85, so the coffee itself only sinks the scheme at about 43 visits a month, which nobody reaches.</a:t>
             </a:r>
           </a:p>
           <a:p>
@@ -5724,7 +5741,7 @@
                 </a:solidFill>
                 <a:latin typeface="Arial"/>
               </a:rPr>
-              <a:t>8.  At £4.10 and a 65 per cent gross margin each food item contributes about £2.67, so the scheme needs roughly 2.2 extra food purchases per subscriber per month simply to stand still.</a:t>
+              <a:t>8.  The real cost is the revenue given up: coffee contribution per customer falls from £17.10 a month to £11.15, so every subscriber starts £5.95 a month behind.</a:t>
             </a:r>
           </a:p>
           <a:p>
@@ -5740,7 +5757,7 @@
                 </a:solidFill>
                 <a:latin typeface="Arial"/>
               </a:rPr>
-              <a:t>9.  That is a demanding target, because it asks five extra visits to produce two extra food sales.</a:t>
+              <a:t>9.  Food is where that £5.95 has to come back, and at £4.10 with a 65 per cent margin each item contributes about £2.67, so the scheme needs roughly 2.2 extra food purchases per subscriber per month just to stand still.</a:t>
             </a:r>
           </a:p>
           <a:p>
@@ -5756,7 +5773,7 @@
                 </a:solidFill>
                 <a:latin typeface="Arial"/>
               </a:rPr>
-              <a:t>10.  It is not out of reach, though: a customer in the shop 11 times a month rather than 6 has more chances to buy, and the food range is small enough that widening it is within Verity's control.</a:t>
+              <a:t>10.  That is demanding, because it asks five extra visits to produce two extra food sales, and the first subscribers will be the heaviest users, so the early trial figures flatter the scheme.</a:t>
             </a:r>
           </a:p>
           <a:p>
@@ -5772,7 +5789,7 @@
                 </a:solidFill>
                 <a:latin typeface="Arial"/>
               </a:rPr>
-              <a:t>11.  Subscriptions also attract the heaviest users first, so the early trial numbers will look worse than the eventual average once lighter customers join.</a:t>
+              <a:t>11.  It still wins, because £5.95 a month is £71.40 a year, and it would take just over 50,000 subscribers losing that for a full year to destroy the £3.6 million that closure spends on day one.</a:t>
             </a:r>
           </a:p>
           <a:p>
@@ -5788,7 +5805,7 @@
                 </a:solidFill>
                 <a:latin typeface="Arial"/>
               </a:rPr>
-              <a:t>12.  None of this touches the underlying problem, which is that operating margin has fallen from 9.0 to 5.0 per cent across all 120 sites while a subscription changes the mix of revenue rather than the cost base.</a:t>
+              <a:t>12.  The two options also differ in kind: a subscription can be repriced or withdrawn next quarter, while a site closed with seven years of lease left cannot be reopened.</a:t>
             </a:r>
           </a:p>
           <a:p>
@@ -5804,7 +5821,7 @@
                 </a:solidFill>
                 <a:latin typeface="Arial"/>
               </a:rPr>
-              <a:t>13.  The likely impact is therefore a small negative in year one, turning positive only if food attachment rises by more than about two items per subscriber per month.</a:t>
+              <a:t>13.  Neither option treats the cause, since revenue grew about 9 per cent while operating profit fell nearly 40 per cent across all 120 sites, so whichever is chosen has to sit inside a cost programme rather than instead of one.</a:t>
             </a:r>
           </a:p>
           <a:p>
@@ -5820,7 +5837,7 @@
                 </a:solidFill>
                 <a:latin typeface="Arial"/>
               </a:rPr>
-              <a:t>14.  Verity should extend the trial and measure one number, food items per visit, because that number decides the outcome and nothing else in the proposal does.</a:t>
+              <a:t>14.  The recommendation is therefore the subscription, launched as a priced trial with one number reported monthly, food items per visit, and withdrawn if it has not reached 2.2 by the end of the second quarter.</a:t>
             </a:r>
           </a:p>
         </p:txBody>
@@ -6045,7 +6062,7 @@
                 </a:solidFill>
                 <a:latin typeface="Arial"/>
               </a:rPr>
-              <a:t>1.  K + AP + AN   Names the concept, then quantifies it. Six visits at £3.20 is the calculation, and it is done rather than described. Cannibalisation is the AO1 term this question is built on and most answers never use it.</a:t>
+              <a:t>1.  EV   The recommendation, in sentence 1, and it names both options. A 20 mark Edexcel question is answered by choosing between the two, not by describing them, and choosing this early organises everything that follows.</a:t>
             </a:r>
           </a:p>
           <a:p>
@@ -6061,7 +6078,7 @@
                 </a:solidFill>
                 <a:latin typeface="Arial"/>
               </a:rPr>
-              <a:t>2.  AP   The counter evidence introduced immediately, so the answer is weighing from the second sentence rather than after a page.</a:t>
+              <a:t>2.  K + AP + EV   Better or worse for what, answered in sentence 2. Naming the criterion is what makes the later weighing possible, and it earns its place here because the two options fail against different parts of it.</a:t>
             </a:r>
           </a:p>
           <a:p>
@@ -6077,7 +6094,7 @@
                 </a:solidFill>
                 <a:latin typeface="Arial"/>
               </a:rPr>
-              <a:t>3.  AP + AN   The consequence of the cost structure, not just the cost. Low variable cost is the reason a subscription can work at all here.</a:t>
+              <a:t>3.  K + AP + AN   Option one built at its strongest, with the arithmetic done rather than described. The option being rejected has to appear at full strength before it is rejected, and this is where most of the analysis marks on this answer sit.</a:t>
             </a:r>
           </a:p>
           <a:p>
@@ -6093,7 +6110,7 @@
                 </a:solidFill>
                 <a:latin typeface="Arial"/>
               </a:rPr>
-              <a:t>4.  AN + EV   A calculated boundary, £15 divided by £0.35. Working out where a proposal would actually fail, and showing it is nowhere near, is a strong evaluative move and almost nobody does it.</a:t>
+              <a:t>4.  AP + AN + EV   The calculation converted into a comparison. Six years is the number a board would actually argue about, and turning £3.6 million and £0.6 million into it is the most valuable single move on the page.</a:t>
             </a:r>
           </a:p>
           <a:p>
@@ -6109,7 +6126,7 @@
                 </a:solidFill>
                 <a:latin typeface="Arial"/>
               </a:rPr>
-              <a:t>5.  EV   Rejects the obvious objection, names the real one, and reaches a position, all in sentence 5. Deciding early organises everything that follows.</a:t>
+              <a:t>5.  AP + EV   Magnitude weighed against the time the business actually has. This is the sentence that disposes of option one, and it does it with two figures rather than with an opinion.</a:t>
             </a:r>
           </a:p>
           <a:p>
@@ -6125,7 +6142,7 @@
                 </a:solidFill>
                 <a:latin typeface="Arial"/>
               </a:rPr>
-              <a:t>6.  K + AP + AN   The full chain, quantified. Contribution rather than revenue, which is the correct measure for this decision.</a:t>
+              <a:t>6.  K + AP + AN   Cannibalisation, quantified in the same sentence that names it. This is the AO1 term option two is built on, and most answers never use it.</a:t>
             </a:r>
           </a:p>
           <a:p>
@@ -6141,7 +6158,7 @@
                 </a:solidFill>
                 <a:latin typeface="Arial"/>
               </a:rPr>
-              <a:t>7.  AN   Nine words, and the figure is what keeps it from being pure signposting. Even so this is analysis rather than judgement: it directs the answer and names the mechanism, but it does not yet weigh anything. Signposting with no content in it earns nothing at all.</a:t>
+              <a:t>7.  K + AN + EV   A calculated boundary, £15 divided by £0.35, used to rule an argument out. Working out where an option would actually fail, and showing it is nowhere near, is a strong evaluative move and almost nobody does it.</a:t>
             </a:r>
           </a:p>
           <a:p>
@@ -6157,7 +6174,7 @@
                 </a:solidFill>
                 <a:latin typeface="Arial"/>
               </a:rPr>
-              <a:t>8.  K + AP + AN   The decisive calculation of the whole answer. It converts a vague hope about attachment into a testable number.</a:t>
+              <a:t>8.  K + AP + AN   Contribution rather than revenue, which is the right measure for this decision, and the chain is finished rather than left at its first step.</a:t>
             </a:r>
           </a:p>
           <a:p>
@@ -6173,7 +6190,7 @@
                 </a:solidFill>
                 <a:latin typeface="Arial"/>
               </a:rPr>
-              <a:t>9.  AN + EV   Converts the number into a judgement about difficulty. The magnitude is what makes this evaluative rather than descriptive.</a:t>
+              <a:t>9.  K + AP + AN   The decisive calculation of the answer. It turns a vague hope about attachment into a number that can be tested, which is what a mark scheme means by using quantitative information to support a judgement.</a:t>
             </a:r>
           </a:p>
           <a:p>
@@ -6189,7 +6206,7 @@
                 </a:solidFill>
                 <a:latin typeface="Arial"/>
               </a:rPr>
-              <a:t>10.  EV   The other side, taken seriously and tied to something the business can actually do. Balance that is anchored in the case rather than in generalities.</a:t>
+              <a:t>10.  AN + EV   The case against the recommended option, put at its strongest and against the answer's own evidence. Interrogating the data you are relying on is a top band habit, and it is more convincing here because it costs the writer something.</a:t>
             </a:r>
           </a:p>
           <a:p>
@@ -6205,7 +6222,7 @@
                 </a:solidFill>
                 <a:latin typeface="Arial"/>
               </a:rPr>
-              <a:t>11.  EV   Challenges the reliability of the evidence the answer has been using. Interrogating your own data is a top band habit.</a:t>
+              <a:t>11.  AP + AN + EV   The comparison that settles the question. Two options can only be ranked once they are on the same scale, and this sentence puts both of them into pounds. Stop here in class and let them check it.</a:t>
             </a:r>
           </a:p>
           <a:p>
@@ -6221,7 +6238,7 @@
                 </a:solidFill>
                 <a:latin typeface="Arial"/>
               </a:rPr>
-              <a:t>12.  AP + EV   Places the proposal against the business's actual problem. This is weighing against a criterion in its clearest form.</a:t>
+              <a:t>12.  AP + EV   Ranking on reversibility rather than on size. Bringing in a criterion the question did not hand you, and showing that it separates the two options, is what lifts an answer above a competent comparison.</a:t>
             </a:r>
           </a:p>
           <a:p>
@@ -6237,7 +6254,7 @@
                 </a:solidFill>
                 <a:latin typeface="Arial"/>
               </a:rPr>
-              <a:t>13.  EV   The decision, with the condition built into the same sentence. Evaluate asks for exactly this.</a:t>
+              <a:t>13.  AP + EV   The reframe, done without dodging the question. Notice that the answer still recommends one of the two options. An answer that concludes that neither option is the real issue has not answered the question that was set.</a:t>
             </a:r>
           </a:p>
           <a:p>
@@ -6253,7 +6270,7 @@
                 </a:solidFill>
                 <a:latin typeface="Arial"/>
               </a:rPr>
-              <a:t>14.  EV   A proportionate next step. Naming the single measure that settles the question is stronger than recommending more analysis in general.</a:t>
+              <a:t>14.  EV   The recommendation restated as something a board could minute, with the condition and the measure inside it. The top level of an Edexcel 20 marker asks for a conclusion that proposes a solution or a recommendation, and this is what that looks like.</a:t>
             </a:r>
           </a:p>
         </p:txBody>
@@ -7134,7 +7151,7 @@
                 </a:solidFill>
                 <a:latin typeface="Arial"/>
               </a:rPr>
-              <a:t>Sentence 2: Add the figure from the case.  Closing them would remove a combined operating loss of £0.6 million.</a:t>
+              <a:t>Sentence 2: Add the figure.  Closing them would remove a combined operating loss of £0.6 million.</a:t>
             </a:r>
           </a:p>
           <a:p>
@@ -8107,13 +8124,13 @@
               </a:spcAft>
             </a:pPr>
             <a:r>
-              <a:rPr sz="2200" b="1">
-                <a:solidFill>
-                  <a:srgbClr val="111111"/>
-                </a:solidFill>
-                <a:latin typeface="Arial"/>
-              </a:rPr>
-              <a:t>Verity Coffee is considering raising prices by 6 per cent across its range in order to restore its operating margin. Evaluate this decision.</a:t>
+              <a:rPr sz="1800" b="1">
+                <a:solidFill>
+                  <a:srgbClr val="111111"/>
+                </a:solidFill>
+                <a:latin typeface="Arial"/>
+              </a:rPr>
+              <a:t>Verity Coffee wants to restore its operating profit margin. It is considering either raising prices by 6 per cent across the range or widening the food range in order to grow food sales per visit. Evaluate these two options and recommend which one Verity Coffee should choose in order to restore its operating profit margin.</a:t>
             </a:r>
           </a:p>
           <a:p>
@@ -8129,7 +8146,7 @@
                 </a:solidFill>
                 <a:latin typeface="Arial"/>
               </a:rPr>
-              <a:t>20 marks. Thirty minutes. Plan for two, write for twenty eight.</a:t>
+              <a:t>20 marks. Thirty five minutes. Plan for five, write for thirty.</a:t>
             </a:r>
           </a:p>
           <a:p>
@@ -8285,7 +8302,7 @@
                 </a:solidFill>
                 <a:latin typeface="Arial"/>
               </a:rPr>
-              <a:t>TEN THINGS TO DO</a:t>
+              <a:t>AQA 7138, FROM SEPTEMBER 2026</a:t>
             </a:r>
           </a:p>
         </p:txBody>
@@ -8364,157 +8381,93 @@
               </a:spcAft>
             </a:pPr>
             <a:r>
-              <a:rPr sz="1300" b="0">
-                <a:solidFill>
-                  <a:srgbClr val="111111"/>
-                </a:solidFill>
-                <a:latin typeface="Arial"/>
-              </a:rPr>
-              <a:t>1.  Decide in the first five sentences. An answer that decides at the end usually argued the other way first and then ran out of time.</a:t>
-            </a:r>
-          </a:p>
-          <a:p>
-            <a:pPr algn="l">
-              <a:spcAft>
-                <a:spcPts val="700"/>
-              </a:spcAft>
-            </a:pPr>
-            <a:r>
-              <a:rPr sz="1300" b="0">
-                <a:solidFill>
-                  <a:srgbClr val="111111"/>
-                </a:solidFill>
-                <a:latin typeface="Arial"/>
-              </a:rPr>
-              <a:t>2.  Say better for what. Better and worse mean nothing until you name what the business is trying to do.</a:t>
-            </a:r>
-          </a:p>
-          <a:p>
-            <a:pPr algn="l">
-              <a:spcAft>
-                <a:spcPts val="700"/>
-              </a:spcAft>
-            </a:pPr>
-            <a:r>
-              <a:rPr sz="1300" b="0">
-                <a:solidFill>
-                  <a:srgbClr val="111111"/>
-                </a:solidFill>
-                <a:latin typeface="Arial"/>
-              </a:rPr>
-              <a:t>3.  Put the other side at its strongest before you reject it. Beating a weak argument earns almost nothing.</a:t>
-            </a:r>
-          </a:p>
-          <a:p>
-            <a:pPr algn="l">
-              <a:spcAft>
-                <a:spcPts val="700"/>
-              </a:spcAft>
-            </a:pPr>
-            <a:r>
-              <a:rPr sz="1300" b="0">
-                <a:solidFill>
-                  <a:srgbClr val="111111"/>
-                </a:solidFill>
-                <a:latin typeface="Arial"/>
-              </a:rPr>
-              <a:t>4.  Every judgement needs a number, a comparison or a piece of evidence sitting next to it.</a:t>
-            </a:r>
-          </a:p>
-          <a:p>
-            <a:pPr algn="l">
-              <a:spcAft>
-                <a:spcPts val="700"/>
-              </a:spcAft>
-            </a:pPr>
-            <a:r>
-              <a:rPr sz="1300" b="0">
-                <a:solidFill>
-                  <a:srgbClr val="111111"/>
-                </a:solidFill>
-                <a:latin typeface="Arial"/>
-              </a:rPr>
-              <a:t>5.  Use the figures you are given. A figure quoted and then abandoned earns less than a figure followed by a therefore.</a:t>
-            </a:r>
-          </a:p>
-          <a:p>
-            <a:pPr algn="l">
-              <a:spcAft>
-                <a:spcPts val="700"/>
-              </a:spcAft>
-            </a:pPr>
-            <a:r>
-              <a:rPr sz="1300" b="0">
-                <a:solidFill>
-                  <a:srgbClr val="111111"/>
-                </a:solidFill>
-                <a:latin typeface="Arial"/>
-              </a:rPr>
-              <a:t>6.  Weigh as you go. Evaluation is a way of writing sentences, not a paragraph at the end.</a:t>
-            </a:r>
-          </a:p>
-          <a:p>
-            <a:pPr algn="l">
-              <a:spcAft>
-                <a:spcPts val="700"/>
-              </a:spcAft>
-            </a:pPr>
-            <a:r>
-              <a:rPr sz="1300" b="0">
-                <a:solidFill>
-                  <a:srgbClr val="111111"/>
-                </a:solidFill>
-                <a:latin typeface="Arial"/>
-              </a:rPr>
-              <a:t>7.  Cut the opening line that restates the question, and cut the line that announces what your essay will do. Both earn nothing.</a:t>
-            </a:r>
-          </a:p>
-          <a:p>
-            <a:pPr algn="l">
-              <a:spcAft>
-                <a:spcPts val="700"/>
-              </a:spcAft>
-            </a:pPr>
-            <a:r>
-              <a:rPr sz="1300" b="0">
-                <a:solidFill>
-                  <a:srgbClr val="111111"/>
-                </a:solidFill>
-                <a:latin typeface="Arial"/>
-              </a:rPr>
-              <a:t>8.  Short sentences carry judgement perfectly well. Some of the strongest lines in a top band answer are under twenty words.</a:t>
-            </a:r>
-          </a:p>
-          <a:p>
-            <a:pPr algn="l">
-              <a:spcAft>
-                <a:spcPts val="700"/>
-              </a:spcAft>
-            </a:pPr>
-            <a:r>
-              <a:rPr sz="1300" b="0">
-                <a:solidFill>
-                  <a:srgbClr val="111111"/>
-                </a:solidFill>
-                <a:latin typeface="Arial"/>
-              </a:rPr>
-              <a:t>9.  Length is not the variable. A seven sentence answer can reach the same band as an eighteen sentence one.</a:t>
-            </a:r>
-          </a:p>
-          <a:p>
-            <a:pPr algn="l">
-              <a:spcAft>
-                <a:spcPts val="700"/>
-              </a:spcAft>
-            </a:pPr>
-            <a:r>
-              <a:rPr sz="1300" b="0">
-                <a:solidFill>
-                  <a:srgbClr val="111111"/>
-                </a:solidFill>
-                <a:latin typeface="Arial"/>
-              </a:rPr>
-              <a:t>10.  Finish with the condition. What would change your mind, in one sentence. Most students never write it, and it is the cheapest mark available.</a:t>
+              <a:rPr sz="1400" b="0">
+                <a:solidFill>
+                  <a:srgbClr val="111111"/>
+                </a:solidFill>
+                <a:latin typeface="Arial"/>
+              </a:rPr>
+              <a:t>Define   2 marks.  Knowledge and understanding only. AO1.</a:t>
+            </a:r>
+          </a:p>
+          <a:p>
+            <a:pPr algn="l">
+              <a:spcAft>
+                <a:spcPts val="700"/>
+              </a:spcAft>
+            </a:pPr>
+            <a:r>
+              <a:rPr sz="1400" b="0">
+                <a:solidFill>
+                  <a:srgbClr val="111111"/>
+                </a:solidFill>
+                <a:latin typeface="Arial"/>
+              </a:rPr>
+              <a:t>Explain   4 marks.  Knowledge and understanding of a business term or concept, in the context of the case study material provided. AO1 and AO2.</a:t>
+            </a:r>
+          </a:p>
+          <a:p>
+            <a:pPr algn="l">
+              <a:spcAft>
+                <a:spcPts val="700"/>
+              </a:spcAft>
+            </a:pPr>
+            <a:r>
+              <a:rPr sz="1400" b="0">
+                <a:solidFill>
+                  <a:srgbClr val="111111"/>
+                </a:solidFill>
+                <a:latin typeface="Arial"/>
+              </a:rPr>
+              <a:t>Analyse   6 marks.  Analyse an issue in the context of the case study material provided. AO1, AO2 and AO3.</a:t>
+            </a:r>
+          </a:p>
+          <a:p>
+            <a:pPr algn="l">
+              <a:spcAft>
+                <a:spcPts val="700"/>
+              </a:spcAft>
+            </a:pPr>
+            <a:r>
+              <a:rPr sz="1400" b="0">
+                <a:solidFill>
+                  <a:srgbClr val="111111"/>
+                </a:solidFill>
+                <a:latin typeface="Arial"/>
+              </a:rPr>
+              <a:t>Assess   9 marks.  Weigh the arguments for and against one action or issue and decide which argument is stronger. A judgement is required. All four objectives.</a:t>
+            </a:r>
+          </a:p>
+          <a:p>
+            <a:pPr algn="l">
+              <a:spcAft>
+                <a:spcPts val="700"/>
+              </a:spcAft>
+            </a:pPr>
+            <a:r>
+              <a:rPr sz="1400" b="0">
+                <a:solidFill>
+                  <a:srgbClr val="111111"/>
+                </a:solidFill>
+                <a:latin typeface="Arial"/>
+              </a:rPr>
+              <a:t>Evaluate   15 marks.  Two options, either identified by the student or set out in the question, evaluated with a recommendation as to which the business should choose. All four objectives.</a:t>
+            </a:r>
+          </a:p>
+          <a:p>
+            <a:pPr algn="l">
+              <a:spcAft>
+                <a:spcPts val="700"/>
+              </a:spcAft>
+            </a:pPr>
+            <a:r>
+              <a:rPr sz="1500" b="1">
+                <a:solidFill>
+                  <a:srgbClr val="111111"/>
+                </a:solidFill>
+                <a:latin typeface="Arial"/>
+              </a:rPr>
+              <a:t>Top tariff is 15, not 25. To what extent and Justify your view are not command words. Evaluate means two options and a recommendation.</a:t>
             </a:r>
           </a:p>
         </p:txBody>
@@ -8553,7 +8506,7 @@
                 </a:solidFill>
                 <a:latin typeface="Arial"/>
               </a:rPr>
-              <a:t>Student page. Read it together in Lesson 1.</a:t>
+              <a:t>AQA 7137 and 7138 specification, version 1.1, November 2025.</a:t>
             </a:r>
           </a:p>
         </p:txBody>
@@ -8585,7 +8538,7 @@
         <p:spPr>
           <a:xfrm>
             <a:off x="457200" y="365760"/>
-            <a:ext cx="11277295" cy="566928"/>
+            <a:ext cx="11277295" cy="548640"/>
           </a:xfrm>
           <a:prstGeom prst="rect">
             <a:avLst/>
@@ -8629,7 +8582,7 @@
         <p:spPr>
           <a:xfrm>
             <a:off x="658368" y="448056"/>
-            <a:ext cx="10911535" cy="566928"/>
+            <a:ext cx="10911535" cy="548640"/>
           </a:xfrm>
           <a:prstGeom prst="rect">
             <a:avLst/>
@@ -8654,7 +8607,7 @@
                 </a:solidFill>
                 <a:latin typeface="Arial"/>
               </a:rPr>
-              <a:t>LESSON 1.  WHAT EVALUATION ACTUALLY IS</a:t>
+              <a:t>TEN THINGS TO DO</a:t>
             </a:r>
           </a:p>
         </p:txBody>
@@ -8667,8 +8620,8 @@
         </p:nvSpPr>
         <p:spPr>
           <a:xfrm>
-            <a:off x="640080" y="1234440"/>
-            <a:ext cx="10911535" cy="4480560"/>
+            <a:off x="640080" y="1143000"/>
+            <a:ext cx="10911535" cy="4937760"/>
           </a:xfrm>
           <a:prstGeom prst="rect">
             <a:avLst/>
@@ -8713,8 +8666,8 @@
         </p:nvSpPr>
         <p:spPr>
           <a:xfrm>
-            <a:off x="914400" y="1490472"/>
-            <a:ext cx="10362895" cy="4023360"/>
+            <a:off x="914400" y="1399032"/>
+            <a:ext cx="10362895" cy="4480560"/>
           </a:xfrm>
           <a:prstGeom prst="rect">
             <a:avLst/>
@@ -8733,61 +8686,157 @@
               </a:spcAft>
             </a:pPr>
             <a:r>
-              <a:rPr sz="2000" b="1">
-                <a:solidFill>
-                  <a:srgbClr val="111111"/>
-                </a:solidFill>
-                <a:latin typeface="Arial"/>
-              </a:rPr>
-              <a:t>By the end of this lesson you will be able to:</a:t>
-            </a:r>
-          </a:p>
-          <a:p>
-            <a:pPr algn="l">
-              <a:spcAft>
-                <a:spcPts val="700"/>
-              </a:spcAft>
-            </a:pPr>
-            <a:r>
-              <a:rPr sz="2000" b="0">
-                <a:solidFill>
-                  <a:srgbClr val="111111"/>
-                </a:solidFill>
-                <a:latin typeface="Arial"/>
-              </a:rPr>
-              <a:t>1.  Distinguish the four assessment objectives in a piece of writing.</a:t>
-            </a:r>
-          </a:p>
-          <a:p>
-            <a:pPr algn="l">
-              <a:spcAft>
-                <a:spcPts val="700"/>
-              </a:spcAft>
-            </a:pPr>
-            <a:r>
-              <a:rPr sz="2000" b="0">
-                <a:solidFill>
-                  <a:srgbClr val="111111"/>
-                </a:solidFill>
-                <a:latin typeface="Arial"/>
-              </a:rPr>
-              <a:t>2.  Explain why balance is not the same as judgement.</a:t>
-            </a:r>
-          </a:p>
-          <a:p>
-            <a:pPr algn="l">
-              <a:spcAft>
-                <a:spcPts val="700"/>
-              </a:spcAft>
-            </a:pPr>
-            <a:r>
-              <a:rPr sz="2000" b="0">
-                <a:solidFill>
-                  <a:srgbClr val="111111"/>
-                </a:solidFill>
-                <a:latin typeface="Arial"/>
-              </a:rPr>
-              <a:t>3.  Tag a short answer sentence by sentence and total the objectives.</a:t>
+              <a:rPr sz="1300" b="0">
+                <a:solidFill>
+                  <a:srgbClr val="111111"/>
+                </a:solidFill>
+                <a:latin typeface="Arial"/>
+              </a:rPr>
+              <a:t>1.  Decide in the first five sentences. An answer that decides at the end usually argued the other way first and then ran out of time.</a:t>
+            </a:r>
+          </a:p>
+          <a:p>
+            <a:pPr algn="l">
+              <a:spcAft>
+                <a:spcPts val="700"/>
+              </a:spcAft>
+            </a:pPr>
+            <a:r>
+              <a:rPr sz="1300" b="0">
+                <a:solidFill>
+                  <a:srgbClr val="111111"/>
+                </a:solidFill>
+                <a:latin typeface="Arial"/>
+              </a:rPr>
+              <a:t>2.  Say better for what. Better and worse mean nothing until you name what the business is trying to do.</a:t>
+            </a:r>
+          </a:p>
+          <a:p>
+            <a:pPr algn="l">
+              <a:spcAft>
+                <a:spcPts val="700"/>
+              </a:spcAft>
+            </a:pPr>
+            <a:r>
+              <a:rPr sz="1300" b="0">
+                <a:solidFill>
+                  <a:srgbClr val="111111"/>
+                </a:solidFill>
+                <a:latin typeface="Arial"/>
+              </a:rPr>
+              <a:t>3.  Put the other side at its strongest before you reject it. Beating a weak argument earns almost nothing.</a:t>
+            </a:r>
+          </a:p>
+          <a:p>
+            <a:pPr algn="l">
+              <a:spcAft>
+                <a:spcPts val="700"/>
+              </a:spcAft>
+            </a:pPr>
+            <a:r>
+              <a:rPr sz="1300" b="0">
+                <a:solidFill>
+                  <a:srgbClr val="111111"/>
+                </a:solidFill>
+                <a:latin typeface="Arial"/>
+              </a:rPr>
+              <a:t>4.  Every judgement needs a number, a comparison or a piece of evidence sitting next to it.</a:t>
+            </a:r>
+          </a:p>
+          <a:p>
+            <a:pPr algn="l">
+              <a:spcAft>
+                <a:spcPts val="700"/>
+              </a:spcAft>
+            </a:pPr>
+            <a:r>
+              <a:rPr sz="1300" b="0">
+                <a:solidFill>
+                  <a:srgbClr val="111111"/>
+                </a:solidFill>
+                <a:latin typeface="Arial"/>
+              </a:rPr>
+              <a:t>5.  Use the figures you are given. A figure quoted and then abandoned earns less than a figure followed by a therefore.</a:t>
+            </a:r>
+          </a:p>
+          <a:p>
+            <a:pPr algn="l">
+              <a:spcAft>
+                <a:spcPts val="700"/>
+              </a:spcAft>
+            </a:pPr>
+            <a:r>
+              <a:rPr sz="1300" b="0">
+                <a:solidFill>
+                  <a:srgbClr val="111111"/>
+                </a:solidFill>
+                <a:latin typeface="Arial"/>
+              </a:rPr>
+              <a:t>6.  Weigh as you go. Evaluation is a way of writing sentences, not a paragraph at the end.</a:t>
+            </a:r>
+          </a:p>
+          <a:p>
+            <a:pPr algn="l">
+              <a:spcAft>
+                <a:spcPts val="700"/>
+              </a:spcAft>
+            </a:pPr>
+            <a:r>
+              <a:rPr sz="1300" b="0">
+                <a:solidFill>
+                  <a:srgbClr val="111111"/>
+                </a:solidFill>
+                <a:latin typeface="Arial"/>
+              </a:rPr>
+              <a:t>7.  Cut the opening line that restates the question, and cut the line that announces what your essay will do. Both earn nothing.</a:t>
+            </a:r>
+          </a:p>
+          <a:p>
+            <a:pPr algn="l">
+              <a:spcAft>
+                <a:spcPts val="700"/>
+              </a:spcAft>
+            </a:pPr>
+            <a:r>
+              <a:rPr sz="1300" b="0">
+                <a:solidFill>
+                  <a:srgbClr val="111111"/>
+                </a:solidFill>
+                <a:latin typeface="Arial"/>
+              </a:rPr>
+              <a:t>8.  Short sentences carry judgement perfectly well. Some of the strongest lines in a top band answer are under twenty words.</a:t>
+            </a:r>
+          </a:p>
+          <a:p>
+            <a:pPr algn="l">
+              <a:spcAft>
+                <a:spcPts val="700"/>
+              </a:spcAft>
+            </a:pPr>
+            <a:r>
+              <a:rPr sz="1300" b="0">
+                <a:solidFill>
+                  <a:srgbClr val="111111"/>
+                </a:solidFill>
+                <a:latin typeface="Arial"/>
+              </a:rPr>
+              <a:t>9.  Padding earns nothing. More words about a point you have already made add no marks, so spend the length on another issue or on finishing an argument, which is what the top band actually asks for.</a:t>
+            </a:r>
+          </a:p>
+          <a:p>
+            <a:pPr algn="l">
+              <a:spcAft>
+                <a:spcPts val="700"/>
+              </a:spcAft>
+            </a:pPr>
+            <a:r>
+              <a:rPr sz="1300" b="0">
+                <a:solidFill>
+                  <a:srgbClr val="111111"/>
+                </a:solidFill>
+                <a:latin typeface="Arial"/>
+              </a:rPr>
+              <a:t>10.  Finish with the condition. What would change your mind, in one sentence. Most students never write it, and it is the cheapest mark available.</a:t>
             </a:r>
           </a:p>
         </p:txBody>
@@ -8826,7 +8875,7 @@
                 </a:solidFill>
                 <a:latin typeface="Arial"/>
               </a:rPr>
-              <a:t>Objectives</a:t>
+              <a:t>Student page. Read it together in Lesson 1.</a:t>
             </a:r>
           </a:p>
         </p:txBody>
@@ -8927,7 +8976,7 @@
                 </a:solidFill>
                 <a:latin typeface="Arial"/>
               </a:rPr>
-              <a:t>DO NOW   |   LESSON 1</a:t>
+              <a:t>LESSON 1.  WHAT EVALUATION ACTUALLY IS</a:t>
             </a:r>
           </a:p>
         </p:txBody>
@@ -9006,45 +9055,61 @@
               </a:spcAft>
             </a:pPr>
             <a:r>
-              <a:rPr sz="2200" b="0">
-                <a:solidFill>
-                  <a:srgbClr val="111111"/>
-                </a:solidFill>
-                <a:latin typeface="Arial"/>
-              </a:rPr>
-              <a:t>1.  What does AO4 stand for?</a:t>
-            </a:r>
-          </a:p>
-          <a:p>
-            <a:pPr algn="l">
-              <a:spcAft>
-                <a:spcPts val="700"/>
-              </a:spcAft>
-            </a:pPr>
-            <a:r>
-              <a:rPr sz="2200" b="0">
-                <a:solidFill>
-                  <a:srgbClr val="111111"/>
-                </a:solidFill>
-                <a:latin typeface="Arial"/>
-              </a:rPr>
-              <a:t>2.  Give one phrase that looks like evaluation and earns nothing.</a:t>
-            </a:r>
-          </a:p>
-          <a:p>
-            <a:pPr algn="l">
-              <a:spcAft>
-                <a:spcPts val="700"/>
-              </a:spcAft>
-            </a:pPr>
-            <a:r>
-              <a:rPr sz="2200" b="0">
-                <a:solidFill>
-                  <a:srgbClr val="111111"/>
-                </a:solidFill>
-                <a:latin typeface="Arial"/>
-              </a:rPr>
-              <a:t>3.  What is the difference between analysis and evaluation?</a:t>
+              <a:rPr sz="2000" b="1">
+                <a:solidFill>
+                  <a:srgbClr val="111111"/>
+                </a:solidFill>
+                <a:latin typeface="Arial"/>
+              </a:rPr>
+              <a:t>By the end of this lesson you will be able to:</a:t>
+            </a:r>
+          </a:p>
+          <a:p>
+            <a:pPr algn="l">
+              <a:spcAft>
+                <a:spcPts val="700"/>
+              </a:spcAft>
+            </a:pPr>
+            <a:r>
+              <a:rPr sz="2000" b="0">
+                <a:solidFill>
+                  <a:srgbClr val="111111"/>
+                </a:solidFill>
+                <a:latin typeface="Arial"/>
+              </a:rPr>
+              <a:t>1.  Distinguish the four assessment objectives in a piece of writing.</a:t>
+            </a:r>
+          </a:p>
+          <a:p>
+            <a:pPr algn="l">
+              <a:spcAft>
+                <a:spcPts val="700"/>
+              </a:spcAft>
+            </a:pPr>
+            <a:r>
+              <a:rPr sz="2000" b="0">
+                <a:solidFill>
+                  <a:srgbClr val="111111"/>
+                </a:solidFill>
+                <a:latin typeface="Arial"/>
+              </a:rPr>
+              <a:t>2.  Explain why balance is not the same as judgement.</a:t>
+            </a:r>
+          </a:p>
+          <a:p>
+            <a:pPr algn="l">
+              <a:spcAft>
+                <a:spcPts val="700"/>
+              </a:spcAft>
+            </a:pPr>
+            <a:r>
+              <a:rPr sz="2000" b="0">
+                <a:solidFill>
+                  <a:srgbClr val="111111"/>
+                </a:solidFill>
+                <a:latin typeface="Arial"/>
+              </a:rPr>
+              <a:t>3.  Tag a short answer sentence by sentence and total the objectives.</a:t>
             </a:r>
           </a:p>
         </p:txBody>
@@ -9083,7 +9148,7 @@
                 </a:solidFill>
                 <a:latin typeface="Arial"/>
               </a:rPr>
-              <a:t>Five minutes.</a:t>
+              <a:t>Objectives</a:t>
             </a:r>
           </a:p>
         </p:txBody>
@@ -9184,7 +9249,7 @@
                 </a:solidFill>
                 <a:latin typeface="Arial"/>
               </a:rPr>
-              <a:t>DO NOW ANSWERS   |   LESSON 1</a:t>
+              <a:t>DO NOW   |   LESSON 1</a:t>
             </a:r>
           </a:p>
         </p:txBody>
@@ -9203,7 +9268,9 @@
           <a:prstGeom prst="rect">
             <a:avLst/>
           </a:prstGeom>
-          <a:noFill/>
+          <a:solidFill>
+            <a:srgbClr val="F2F2F2"/>
+          </a:solidFill>
           <a:ln w="25400">
             <a:solidFill>
               <a:srgbClr val="111111"/>
@@ -9261,45 +9328,45 @@
               </a:spcAft>
             </a:pPr>
             <a:r>
-              <a:rPr sz="1700" b="1">
-                <a:solidFill>
-                  <a:srgbClr val="111111"/>
-                </a:solidFill>
-                <a:latin typeface="Arial"/>
-              </a:rPr>
-              <a:t>1.  Evaluation. Judgement, weighing, conditions and supported decisions.</a:t>
-            </a:r>
-          </a:p>
-          <a:p>
-            <a:pPr algn="l">
-              <a:spcAft>
-                <a:spcPts val="700"/>
-              </a:spcAft>
-            </a:pPr>
-            <a:r>
-              <a:rPr sz="1700" b="1">
-                <a:solidFill>
-                  <a:srgbClr val="111111"/>
-                </a:solidFill>
-                <a:latin typeface="Arial"/>
-              </a:rPr>
-              <a:t>2.  It depends. Both have advantages. In conclusion it is important to consider all factors.</a:t>
-            </a:r>
-          </a:p>
-          <a:p>
-            <a:pPr algn="l">
-              <a:spcAft>
-                <a:spcPts val="700"/>
-              </a:spcAft>
-            </a:pPr>
-            <a:r>
-              <a:rPr sz="1700" b="1">
-                <a:solidFill>
-                  <a:srgbClr val="111111"/>
-                </a:solidFill>
-                <a:latin typeface="Arial"/>
-              </a:rPr>
-              <a:t>3.  Analysis follows a consequence through. Evaluation weighs it against something and decides.</a:t>
+              <a:rPr sz="2200" b="0">
+                <a:solidFill>
+                  <a:srgbClr val="111111"/>
+                </a:solidFill>
+                <a:latin typeface="Arial"/>
+              </a:rPr>
+              <a:t>1.  What does AO4 stand for?</a:t>
+            </a:r>
+          </a:p>
+          <a:p>
+            <a:pPr algn="l">
+              <a:spcAft>
+                <a:spcPts val="700"/>
+              </a:spcAft>
+            </a:pPr>
+            <a:r>
+              <a:rPr sz="2200" b="0">
+                <a:solidFill>
+                  <a:srgbClr val="111111"/>
+                </a:solidFill>
+                <a:latin typeface="Arial"/>
+              </a:rPr>
+              <a:t>2.  Give one phrase that looks like evaluation and earns nothing.</a:t>
+            </a:r>
+          </a:p>
+          <a:p>
+            <a:pPr algn="l">
+              <a:spcAft>
+                <a:spcPts val="700"/>
+              </a:spcAft>
+            </a:pPr>
+            <a:r>
+              <a:rPr sz="2200" b="0">
+                <a:solidFill>
+                  <a:srgbClr val="111111"/>
+                </a:solidFill>
+                <a:latin typeface="Arial"/>
+              </a:rPr>
+              <a:t>3.  What is the difference between analysis and evaluation?</a:t>
             </a:r>
           </a:p>
         </p:txBody>
@@ -9338,7 +9405,7 @@
                 </a:solidFill>
                 <a:latin typeface="Arial"/>
               </a:rPr>
-              <a:t>Mark in green.</a:t>
+              <a:t>Five minutes.</a:t>
             </a:r>
           </a:p>
         </p:txBody>
@@ -9439,7 +9506,7 @@
                 </a:solidFill>
                 <a:latin typeface="Arial"/>
               </a:rPr>
-              <a:t>LESSON 2.  READING THE ANNOTATION</a:t>
+              <a:t>DO NOW ANSWERS   |   LESSON 1</a:t>
             </a:r>
           </a:p>
         </p:txBody>
@@ -9458,9 +9525,7 @@
           <a:prstGeom prst="rect">
             <a:avLst/>
           </a:prstGeom>
-          <a:solidFill>
-            <a:srgbClr val="F2F2F2"/>
-          </a:solidFill>
+          <a:noFill/>
           <a:ln w="25400">
             <a:solidFill>
               <a:srgbClr val="111111"/>
@@ -9518,61 +9583,45 @@
               </a:spcAft>
             </a:pPr>
             <a:r>
-              <a:rPr sz="2000" b="1">
-                <a:solidFill>
-                  <a:srgbClr val="111111"/>
-                </a:solidFill>
-                <a:latin typeface="Arial"/>
-              </a:rPr>
-              <a:t>By the end of this lesson you will be able to:</a:t>
-            </a:r>
-          </a:p>
-          <a:p>
-            <a:pPr algn="l">
-              <a:spcAft>
-                <a:spcPts val="700"/>
-              </a:spcAft>
-            </a:pPr>
-            <a:r>
-              <a:rPr sz="2000" b="0">
-                <a:solidFill>
-                  <a:srgbClr val="111111"/>
-                </a:solidFill>
-                <a:latin typeface="Arial"/>
-              </a:rPr>
-              <a:t>1.  Identify which sentence in a strong answer carries the decisive judgement.</a:t>
-            </a:r>
-          </a:p>
-          <a:p>
-            <a:pPr algn="l">
-              <a:spcAft>
-                <a:spcPts val="700"/>
-              </a:spcAft>
-            </a:pPr>
-            <a:r>
-              <a:rPr sz="2000" b="0">
-                <a:solidFill>
-                  <a:srgbClr val="111111"/>
-                </a:solidFill>
-                <a:latin typeface="Arial"/>
-              </a:rPr>
-              <a:t>2.  Explain why a sentence earns application rather than knowledge.</a:t>
-            </a:r>
-          </a:p>
-          <a:p>
-            <a:pPr algn="l">
-              <a:spcAft>
-                <a:spcPts val="700"/>
-              </a:spcAft>
-            </a:pPr>
-            <a:r>
-              <a:rPr sz="2000" b="0">
-                <a:solidFill>
-                  <a:srgbClr val="111111"/>
-                </a:solidFill>
-                <a:latin typeface="Arial"/>
-              </a:rPr>
-              <a:t>3.  Write three evaluative sentences using shapes taken from the model.</a:t>
+              <a:rPr sz="1700" b="1">
+                <a:solidFill>
+                  <a:srgbClr val="111111"/>
+                </a:solidFill>
+                <a:latin typeface="Arial"/>
+              </a:rPr>
+              <a:t>1.  Evaluation. Judgement, weighing, conditions and supported decisions.</a:t>
+            </a:r>
+          </a:p>
+          <a:p>
+            <a:pPr algn="l">
+              <a:spcAft>
+                <a:spcPts val="700"/>
+              </a:spcAft>
+            </a:pPr>
+            <a:r>
+              <a:rPr sz="1700" b="1">
+                <a:solidFill>
+                  <a:srgbClr val="111111"/>
+                </a:solidFill>
+                <a:latin typeface="Arial"/>
+              </a:rPr>
+              <a:t>2.  It depends. Both have advantages. In conclusion it is important to consider all factors.</a:t>
+            </a:r>
+          </a:p>
+          <a:p>
+            <a:pPr algn="l">
+              <a:spcAft>
+                <a:spcPts val="700"/>
+              </a:spcAft>
+            </a:pPr>
+            <a:r>
+              <a:rPr sz="1700" b="1">
+                <a:solidFill>
+                  <a:srgbClr val="111111"/>
+                </a:solidFill>
+                <a:latin typeface="Arial"/>
+              </a:rPr>
+              <a:t>3.  Analysis follows a consequence through. Evaluation weighs it against something and decides.</a:t>
             </a:r>
           </a:p>
         </p:txBody>
@@ -9611,7 +9660,7 @@
                 </a:solidFill>
                 <a:latin typeface="Arial"/>
               </a:rPr>
-              <a:t>Objectives</a:t>
+              <a:t>Mark in green.</a:t>
             </a:r>
           </a:p>
         </p:txBody>
@@ -9712,7 +9761,7 @@
                 </a:solidFill>
                 <a:latin typeface="Arial"/>
               </a:rPr>
-              <a:t>DO NOW   |   LESSON 2</a:t>
+              <a:t>LESSON 2.  READING THE ANNOTATION</a:t>
             </a:r>
           </a:p>
         </p:txBody>
@@ -9791,45 +9840,61 @@
               </a:spcAft>
             </a:pPr>
             <a:r>
-              <a:rPr sz="2200" b="0">
-                <a:solidFill>
-                  <a:srgbClr val="111111"/>
-                </a:solidFill>
-                <a:latin typeface="Arial"/>
-              </a:rPr>
-              <a:t>1.  What must a sentence contain to earn application?</a:t>
-            </a:r>
-          </a:p>
-          <a:p>
-            <a:pPr algn="l">
-              <a:spcAft>
-                <a:spcPts val="700"/>
-              </a:spcAft>
-            </a:pPr>
-            <a:r>
-              <a:rPr sz="2200" b="0">
-                <a:solidFill>
-                  <a:srgbClr val="111111"/>
-                </a:solidFill>
-                <a:latin typeface="Arial"/>
-              </a:rPr>
-              <a:t>2.  Why does a judgement need a number?</a:t>
-            </a:r>
-          </a:p>
-          <a:p>
-            <a:pPr algn="l">
-              <a:spcAft>
-                <a:spcPts val="700"/>
-              </a:spcAft>
-            </a:pPr>
-            <a:r>
-              <a:rPr sz="2200" b="0">
-                <a:solidFill>
-                  <a:srgbClr val="111111"/>
-                </a:solidFill>
-                <a:latin typeface="Arial"/>
-              </a:rPr>
-              <a:t>3.  Where should the decision appear in an answer?</a:t>
+              <a:rPr sz="2000" b="1">
+                <a:solidFill>
+                  <a:srgbClr val="111111"/>
+                </a:solidFill>
+                <a:latin typeface="Arial"/>
+              </a:rPr>
+              <a:t>By the end of this lesson you will be able to:</a:t>
+            </a:r>
+          </a:p>
+          <a:p>
+            <a:pPr algn="l">
+              <a:spcAft>
+                <a:spcPts val="700"/>
+              </a:spcAft>
+            </a:pPr>
+            <a:r>
+              <a:rPr sz="2000" b="0">
+                <a:solidFill>
+                  <a:srgbClr val="111111"/>
+                </a:solidFill>
+                <a:latin typeface="Arial"/>
+              </a:rPr>
+              <a:t>1.  Identify which sentence in a strong answer carries the decisive judgement.</a:t>
+            </a:r>
+          </a:p>
+          <a:p>
+            <a:pPr algn="l">
+              <a:spcAft>
+                <a:spcPts val="700"/>
+              </a:spcAft>
+            </a:pPr>
+            <a:r>
+              <a:rPr sz="2000" b="0">
+                <a:solidFill>
+                  <a:srgbClr val="111111"/>
+                </a:solidFill>
+                <a:latin typeface="Arial"/>
+              </a:rPr>
+              <a:t>2.  Explain why a sentence earns application rather than knowledge.</a:t>
+            </a:r>
+          </a:p>
+          <a:p>
+            <a:pPr algn="l">
+              <a:spcAft>
+                <a:spcPts val="700"/>
+              </a:spcAft>
+            </a:pPr>
+            <a:r>
+              <a:rPr sz="2000" b="0">
+                <a:solidFill>
+                  <a:srgbClr val="111111"/>
+                </a:solidFill>
+                <a:latin typeface="Arial"/>
+              </a:rPr>
+              <a:t>3.  Write three evaluative sentences using shapes taken from the model.</a:t>
             </a:r>
           </a:p>
         </p:txBody>
@@ -9868,7 +9933,7 @@
                 </a:solidFill>
                 <a:latin typeface="Arial"/>
               </a:rPr>
-              <a:t>Five minutes.</a:t>
+              <a:t>Objectives</a:t>
             </a:r>
           </a:p>
         </p:txBody>
@@ -9969,7 +10034,7 @@
                 </a:solidFill>
                 <a:latin typeface="Arial"/>
               </a:rPr>
-              <a:t>DO NOW ANSWERS   |   LESSON 2</a:t>
+              <a:t>DO NOW   |   LESSON 2</a:t>
             </a:r>
           </a:p>
         </p:txBody>
@@ -9988,7 +10053,9 @@
           <a:prstGeom prst="rect">
             <a:avLst/>
           </a:prstGeom>
-          <a:noFill/>
+          <a:solidFill>
+            <a:srgbClr val="F2F2F2"/>
+          </a:solidFill>
           <a:ln w="25400">
             <a:solidFill>
               <a:srgbClr val="111111"/>
@@ -10046,45 +10113,45 @@
               </a:spcAft>
             </a:pPr>
             <a:r>
-              <a:rPr sz="1700" b="1">
-                <a:solidFill>
-                  <a:srgbClr val="111111"/>
-                </a:solidFill>
-                <a:latin typeface="Arial"/>
-              </a:rPr>
-              <a:t>1.  Something specific to this business, its figures or its situation.</a:t>
-            </a:r>
-          </a:p>
-          <a:p>
-            <a:pPr algn="l">
-              <a:spcAft>
-                <a:spcPts val="700"/>
-              </a:spcAft>
-            </a:pPr>
-            <a:r>
-              <a:rPr sz="1700" b="1">
-                <a:solidFill>
-                  <a:srgbClr val="111111"/>
-                </a:solidFill>
-                <a:latin typeface="Arial"/>
-              </a:rPr>
-              <a:t>2.  Without evidence it reads as a guess. The figure is what turns an opinion into a mark.</a:t>
-            </a:r>
-          </a:p>
-          <a:p>
-            <a:pPr algn="l">
-              <a:spcAft>
-                <a:spcPts val="700"/>
-              </a:spcAft>
-            </a:pPr>
-            <a:r>
-              <a:rPr sz="1700" b="1">
-                <a:solidFill>
-                  <a:srgbClr val="111111"/>
-                </a:solidFill>
-                <a:latin typeface="Arial"/>
-              </a:rPr>
-              <a:t>3.  Early. An answer that decides at the end usually runs out of time and argues the other way first.</a:t>
+              <a:rPr sz="2200" b="0">
+                <a:solidFill>
+                  <a:srgbClr val="111111"/>
+                </a:solidFill>
+                <a:latin typeface="Arial"/>
+              </a:rPr>
+              <a:t>1.  What must a sentence contain to earn application?</a:t>
+            </a:r>
+          </a:p>
+          <a:p>
+            <a:pPr algn="l">
+              <a:spcAft>
+                <a:spcPts val="700"/>
+              </a:spcAft>
+            </a:pPr>
+            <a:r>
+              <a:rPr sz="2200" b="0">
+                <a:solidFill>
+                  <a:srgbClr val="111111"/>
+                </a:solidFill>
+                <a:latin typeface="Arial"/>
+              </a:rPr>
+              <a:t>2.  Why does a judgement need a number?</a:t>
+            </a:r>
+          </a:p>
+          <a:p>
+            <a:pPr algn="l">
+              <a:spcAft>
+                <a:spcPts val="700"/>
+              </a:spcAft>
+            </a:pPr>
+            <a:r>
+              <a:rPr sz="2200" b="0">
+                <a:solidFill>
+                  <a:srgbClr val="111111"/>
+                </a:solidFill>
+                <a:latin typeface="Arial"/>
+              </a:rPr>
+              <a:t>3.  Where should the decision appear in an answer?</a:t>
             </a:r>
           </a:p>
         </p:txBody>
@@ -10123,7 +10190,7 @@
                 </a:solidFill>
                 <a:latin typeface="Arial"/>
               </a:rPr>
-              <a:t>Mark in green.</a:t>
+              <a:t>Five minutes.</a:t>
             </a:r>
           </a:p>
         </p:txBody>
@@ -10224,7 +10291,7 @@
                 </a:solidFill>
                 <a:latin typeface="Arial"/>
               </a:rPr>
-              <a:t>LESSON 3.  IMPROVING A MID BAND ANSWER, LIVE</a:t>
+              <a:t>DO NOW ANSWERS   |   LESSON 2</a:t>
             </a:r>
           </a:p>
         </p:txBody>
@@ -10243,9 +10310,7 @@
           <a:prstGeom prst="rect">
             <a:avLst/>
           </a:prstGeom>
-          <a:solidFill>
-            <a:srgbClr val="F2F2F2"/>
-          </a:solidFill>
+          <a:noFill/>
           <a:ln w="25400">
             <a:solidFill>
               <a:srgbClr val="111111"/>
@@ -10303,61 +10368,45 @@
               </a:spcAft>
             </a:pPr>
             <a:r>
-              <a:rPr sz="2000" b="1">
-                <a:solidFill>
-                  <a:srgbClr val="111111"/>
-                </a:solidFill>
-                <a:latin typeface="Arial"/>
-              </a:rPr>
-              <a:t>By the end of this lesson you will be able to:</a:t>
-            </a:r>
-          </a:p>
-          <a:p>
-            <a:pPr algn="l">
-              <a:spcAft>
-                <a:spcPts val="700"/>
-              </a:spcAft>
-            </a:pPr>
-            <a:r>
-              <a:rPr sz="2000" b="0">
-                <a:solidFill>
-                  <a:srgbClr val="111111"/>
-                </a:solidFill>
-                <a:latin typeface="Arial"/>
-              </a:rPr>
-              <a:t>1.  Identify the sentences in a mid band answer that earn nothing.</a:t>
-            </a:r>
-          </a:p>
-          <a:p>
-            <a:pPr algn="l">
-              <a:spcAft>
-                <a:spcPts val="700"/>
-              </a:spcAft>
-            </a:pPr>
-            <a:r>
-              <a:rPr sz="2000" b="0">
-                <a:solidFill>
-                  <a:srgbClr val="111111"/>
-                </a:solidFill>
-                <a:latin typeface="Arial"/>
-              </a:rPr>
-              <a:t>2.  Rewrite a generic point so that it uses evidence from the case.</a:t>
-            </a:r>
-          </a:p>
-          <a:p>
-            <a:pPr algn="l">
-              <a:spcAft>
-                <a:spcPts val="700"/>
-              </a:spcAft>
-            </a:pPr>
-            <a:r>
-              <a:rPr sz="2000" b="0">
-                <a:solidFill>
-                  <a:srgbClr val="111111"/>
-                </a:solidFill>
-                <a:latin typeface="Arial"/>
-              </a:rPr>
-              <a:t>3.  Replace a summary ending with a condition.</a:t>
+              <a:rPr sz="1700" b="1">
+                <a:solidFill>
+                  <a:srgbClr val="111111"/>
+                </a:solidFill>
+                <a:latin typeface="Arial"/>
+              </a:rPr>
+              <a:t>1.  Something specific to this business, its figures or its situation.</a:t>
+            </a:r>
+          </a:p>
+          <a:p>
+            <a:pPr algn="l">
+              <a:spcAft>
+                <a:spcPts val="700"/>
+              </a:spcAft>
+            </a:pPr>
+            <a:r>
+              <a:rPr sz="1700" b="1">
+                <a:solidFill>
+                  <a:srgbClr val="111111"/>
+                </a:solidFill>
+                <a:latin typeface="Arial"/>
+              </a:rPr>
+              <a:t>2.  Without evidence it reads as a guess. The figure is what turns an opinion into a mark.</a:t>
+            </a:r>
+          </a:p>
+          <a:p>
+            <a:pPr algn="l">
+              <a:spcAft>
+                <a:spcPts val="700"/>
+              </a:spcAft>
+            </a:pPr>
+            <a:r>
+              <a:rPr sz="1700" b="1">
+                <a:solidFill>
+                  <a:srgbClr val="111111"/>
+                </a:solidFill>
+                <a:latin typeface="Arial"/>
+              </a:rPr>
+              <a:t>3.  Early. An answer that decides at the end usually runs out of time and argues the other way first.</a:t>
             </a:r>
           </a:p>
         </p:txBody>
@@ -10396,7 +10445,7 @@
                 </a:solidFill>
                 <a:latin typeface="Arial"/>
               </a:rPr>
-              <a:t>Objectives</a:t>
+              <a:t>Mark in green.</a:t>
             </a:r>
           </a:p>
         </p:txBody>
@@ -10786,7 +10835,7 @@
                 </a:solidFill>
                 <a:latin typeface="Arial"/>
               </a:rPr>
-              <a:t>DO NOW   |   LESSON 3</a:t>
+              <a:t>LESSON 3.  IMPROVING A MID BAND ANSWER, LIVE</a:t>
             </a:r>
           </a:p>
         </p:txBody>
@@ -10865,45 +10914,61 @@
               </a:spcAft>
             </a:pPr>
             <a:r>
-              <a:rPr sz="2200" b="0">
-                <a:solidFill>
-                  <a:srgbClr val="111111"/>
-                </a:solidFill>
-                <a:latin typeface="Arial"/>
-              </a:rPr>
-              <a:t>1.  Name two things that make a sentence earn nothing.</a:t>
-            </a:r>
-          </a:p>
-          <a:p>
-            <a:pPr algn="l">
-              <a:spcAft>
-                <a:spcPts val="700"/>
-              </a:spcAft>
-            </a:pPr>
-            <a:r>
-              <a:rPr sz="2200" b="0">
-                <a:solidFill>
-                  <a:srgbClr val="111111"/>
-                </a:solidFill>
-                <a:latin typeface="Arial"/>
-              </a:rPr>
-              <a:t>2.  What is wrong with ending on it depends?</a:t>
-            </a:r>
-          </a:p>
-          <a:p>
-            <a:pPr algn="l">
-              <a:spcAft>
-                <a:spcPts val="700"/>
-              </a:spcAft>
-            </a:pPr>
-            <a:r>
-              <a:rPr sz="2200" b="0">
-                <a:solidFill>
-                  <a:srgbClr val="111111"/>
-                </a:solidFill>
-                <a:latin typeface="Arial"/>
-              </a:rPr>
-              <a:t>3.  What does a condition sentence do?</a:t>
+              <a:rPr sz="2000" b="1">
+                <a:solidFill>
+                  <a:srgbClr val="111111"/>
+                </a:solidFill>
+                <a:latin typeface="Arial"/>
+              </a:rPr>
+              <a:t>By the end of this lesson you will be able to:</a:t>
+            </a:r>
+          </a:p>
+          <a:p>
+            <a:pPr algn="l">
+              <a:spcAft>
+                <a:spcPts val="700"/>
+              </a:spcAft>
+            </a:pPr>
+            <a:r>
+              <a:rPr sz="2000" b="0">
+                <a:solidFill>
+                  <a:srgbClr val="111111"/>
+                </a:solidFill>
+                <a:latin typeface="Arial"/>
+              </a:rPr>
+              <a:t>1.  Identify the sentences in a mid band answer that earn nothing.</a:t>
+            </a:r>
+          </a:p>
+          <a:p>
+            <a:pPr algn="l">
+              <a:spcAft>
+                <a:spcPts val="700"/>
+              </a:spcAft>
+            </a:pPr>
+            <a:r>
+              <a:rPr sz="2000" b="0">
+                <a:solidFill>
+                  <a:srgbClr val="111111"/>
+                </a:solidFill>
+                <a:latin typeface="Arial"/>
+              </a:rPr>
+              <a:t>2.  Rewrite a generic point so that it uses evidence from the case.</a:t>
+            </a:r>
+          </a:p>
+          <a:p>
+            <a:pPr algn="l">
+              <a:spcAft>
+                <a:spcPts val="700"/>
+              </a:spcAft>
+            </a:pPr>
+            <a:r>
+              <a:rPr sz="2000" b="0">
+                <a:solidFill>
+                  <a:srgbClr val="111111"/>
+                </a:solidFill>
+                <a:latin typeface="Arial"/>
+              </a:rPr>
+              <a:t>3.  Replace a summary ending with a condition.</a:t>
             </a:r>
           </a:p>
         </p:txBody>
@@ -10942,7 +11007,7 @@
                 </a:solidFill>
                 <a:latin typeface="Arial"/>
               </a:rPr>
-              <a:t>Five minutes.</a:t>
+              <a:t>Objectives</a:t>
             </a:r>
           </a:p>
         </p:txBody>
@@ -11043,7 +11108,7 @@
                 </a:solidFill>
                 <a:latin typeface="Arial"/>
               </a:rPr>
-              <a:t>DO NOW ANSWERS   |   LESSON 3</a:t>
+              <a:t>DO NOW   |   LESSON 3</a:t>
             </a:r>
           </a:p>
         </p:txBody>
@@ -11062,7 +11127,9 @@
           <a:prstGeom prst="rect">
             <a:avLst/>
           </a:prstGeom>
-          <a:noFill/>
+          <a:solidFill>
+            <a:srgbClr val="F2F2F2"/>
+          </a:solidFill>
           <a:ln w="25400">
             <a:solidFill>
               <a:srgbClr val="111111"/>
@@ -11120,45 +11187,45 @@
               </a:spcAft>
             </a:pPr>
             <a:r>
-              <a:rPr sz="1700" b="1">
-                <a:solidFill>
-                  <a:srgbClr val="111111"/>
-                </a:solidFill>
-                <a:latin typeface="Arial"/>
-              </a:rPr>
-              <a:t>1.  Restating the question, or being true of any business anywhere.</a:t>
-            </a:r>
-          </a:p>
-          <a:p>
-            <a:pPr algn="l">
-              <a:spcAft>
-                <a:spcPts val="700"/>
-              </a:spcAft>
-            </a:pPr>
-            <a:r>
-              <a:rPr sz="1700" b="1">
-                <a:solidFill>
-                  <a:srgbClr val="111111"/>
-                </a:solidFill>
-                <a:latin typeface="Arial"/>
-              </a:rPr>
-              <a:t>2.  No decision and no criterion, so nothing is being weighed.</a:t>
-            </a:r>
-          </a:p>
-          <a:p>
-            <a:pPr algn="l">
-              <a:spcAft>
-                <a:spcPts val="700"/>
-              </a:spcAft>
-            </a:pPr>
-            <a:r>
-              <a:rPr sz="1700" b="1">
-                <a:solidFill>
-                  <a:srgbClr val="111111"/>
-                </a:solidFill>
-                <a:latin typeface="Arial"/>
-              </a:rPr>
-              <a:t>3.  Names what would change the decision, which shows the judgement was reasoned.</a:t>
+              <a:rPr sz="2200" b="0">
+                <a:solidFill>
+                  <a:srgbClr val="111111"/>
+                </a:solidFill>
+                <a:latin typeface="Arial"/>
+              </a:rPr>
+              <a:t>1.  Name two things that make a sentence earn nothing.</a:t>
+            </a:r>
+          </a:p>
+          <a:p>
+            <a:pPr algn="l">
+              <a:spcAft>
+                <a:spcPts val="700"/>
+              </a:spcAft>
+            </a:pPr>
+            <a:r>
+              <a:rPr sz="2200" b="0">
+                <a:solidFill>
+                  <a:srgbClr val="111111"/>
+                </a:solidFill>
+                <a:latin typeface="Arial"/>
+              </a:rPr>
+              <a:t>2.  What is wrong with ending on it depends?</a:t>
+            </a:r>
+          </a:p>
+          <a:p>
+            <a:pPr algn="l">
+              <a:spcAft>
+                <a:spcPts val="700"/>
+              </a:spcAft>
+            </a:pPr>
+            <a:r>
+              <a:rPr sz="2200" b="0">
+                <a:solidFill>
+                  <a:srgbClr val="111111"/>
+                </a:solidFill>
+                <a:latin typeface="Arial"/>
+              </a:rPr>
+              <a:t>3.  What does a condition sentence do?</a:t>
             </a:r>
           </a:p>
         </p:txBody>
@@ -11197,7 +11264,7 @@
                 </a:solidFill>
                 <a:latin typeface="Arial"/>
               </a:rPr>
-              <a:t>Mark in green.</a:t>
+              <a:t>Five minutes.</a:t>
             </a:r>
           </a:p>
         </p:txBody>
@@ -11298,7 +11365,7 @@
                 </a:solidFill>
                 <a:latin typeface="Arial"/>
               </a:rPr>
-              <a:t>LESSON 4.  TIMED PRACTICE AND TAGGED PEER MARKING</a:t>
+              <a:t>DO NOW ANSWERS   |   LESSON 3</a:t>
             </a:r>
           </a:p>
         </p:txBody>
@@ -11317,9 +11384,7 @@
           <a:prstGeom prst="rect">
             <a:avLst/>
           </a:prstGeom>
-          <a:solidFill>
-            <a:srgbClr val="F2F2F2"/>
-          </a:solidFill>
+          <a:noFill/>
           <a:ln w="25400">
             <a:solidFill>
               <a:srgbClr val="111111"/>
@@ -11377,61 +11442,45 @@
               </a:spcAft>
             </a:pPr>
             <a:r>
-              <a:rPr sz="2000" b="1">
-                <a:solidFill>
-                  <a:srgbClr val="111111"/>
-                </a:solidFill>
-                <a:latin typeface="Arial"/>
-              </a:rPr>
-              <a:t>By the end of this lesson you will be able to:</a:t>
-            </a:r>
-          </a:p>
-          <a:p>
-            <a:pPr algn="l">
-              <a:spcAft>
-                <a:spcPts val="700"/>
-              </a:spcAft>
-            </a:pPr>
-            <a:r>
-              <a:rPr sz="2000" b="0">
-                <a:solidFill>
-                  <a:srgbClr val="111111"/>
-                </a:solidFill>
-                <a:latin typeface="Arial"/>
-              </a:rPr>
-              <a:t>1.  Plan and write a timed evaluative answer using the five step method.</a:t>
-            </a:r>
-          </a:p>
-          <a:p>
-            <a:pPr algn="l">
-              <a:spcAft>
-                <a:spcPts val="700"/>
-              </a:spcAft>
-            </a:pPr>
-            <a:r>
-              <a:rPr sz="2000" b="0">
-                <a:solidFill>
-                  <a:srgbClr val="111111"/>
-                </a:solidFill>
-                <a:latin typeface="Arial"/>
-              </a:rPr>
-              <a:t>2.  Tag a peer's answer objective by objective.</a:t>
-            </a:r>
-          </a:p>
-          <a:p>
-            <a:pPr algn="l">
-              <a:spcAft>
-                <a:spcPts val="700"/>
-              </a:spcAft>
-            </a:pPr>
-            <a:r>
-              <a:rPr sz="2000" b="0">
-                <a:solidFill>
-                  <a:srgbClr val="111111"/>
-                </a:solidFill>
-                <a:latin typeface="Arial"/>
-              </a:rPr>
-              <a:t>3.  Give one specific improvement rather than a general comment.</a:t>
+              <a:rPr sz="1700" b="1">
+                <a:solidFill>
+                  <a:srgbClr val="111111"/>
+                </a:solidFill>
+                <a:latin typeface="Arial"/>
+              </a:rPr>
+              <a:t>1.  Restating the question, or being true of any business anywhere.</a:t>
+            </a:r>
+          </a:p>
+          <a:p>
+            <a:pPr algn="l">
+              <a:spcAft>
+                <a:spcPts val="700"/>
+              </a:spcAft>
+            </a:pPr>
+            <a:r>
+              <a:rPr sz="1700" b="1">
+                <a:solidFill>
+                  <a:srgbClr val="111111"/>
+                </a:solidFill>
+                <a:latin typeface="Arial"/>
+              </a:rPr>
+              <a:t>2.  No decision and no criterion, so nothing is being weighed.</a:t>
+            </a:r>
+          </a:p>
+          <a:p>
+            <a:pPr algn="l">
+              <a:spcAft>
+                <a:spcPts val="700"/>
+              </a:spcAft>
+            </a:pPr>
+            <a:r>
+              <a:rPr sz="1700" b="1">
+                <a:solidFill>
+                  <a:srgbClr val="111111"/>
+                </a:solidFill>
+                <a:latin typeface="Arial"/>
+              </a:rPr>
+              <a:t>3.  Names what would change the decision, which shows the judgement was reasoned.</a:t>
             </a:r>
           </a:p>
         </p:txBody>
@@ -11470,7 +11519,7 @@
                 </a:solidFill>
                 <a:latin typeface="Arial"/>
               </a:rPr>
-              <a:t>Objectives</a:t>
+              <a:t>Mark in green.</a:t>
             </a:r>
           </a:p>
         </p:txBody>
@@ -11571,7 +11620,7 @@
                 </a:solidFill>
                 <a:latin typeface="Arial"/>
               </a:rPr>
-              <a:t>DO NOW   |   LESSON 4</a:t>
+              <a:t>LESSON 4.  TIMED PRACTICE AND TAGGED PEER MARKING</a:t>
             </a:r>
           </a:p>
         </p:txBody>
@@ -11650,45 +11699,61 @@
               </a:spcAft>
             </a:pPr>
             <a:r>
-              <a:rPr sz="2200" b="0">
-                <a:solidFill>
-                  <a:srgbClr val="111111"/>
-                </a:solidFill>
-                <a:latin typeface="Arial"/>
-              </a:rPr>
-              <a:t>1.  State the five steps of the method from memory.</a:t>
-            </a:r>
-          </a:p>
-          <a:p>
-            <a:pPr algn="l">
-              <a:spcAft>
-                <a:spcPts val="700"/>
-              </a:spcAft>
-            </a:pPr>
-            <a:r>
-              <a:rPr sz="2200" b="0">
-                <a:solidFill>
-                  <a:srgbClr val="111111"/>
-                </a:solidFill>
-                <a:latin typeface="Arial"/>
-              </a:rPr>
-              <a:t>2.  How early should the decision appear?</a:t>
-            </a:r>
-          </a:p>
-          <a:p>
-            <a:pPr algn="l">
-              <a:spcAft>
-                <a:spcPts val="700"/>
-              </a:spcAft>
-            </a:pPr>
-            <a:r>
-              <a:rPr sz="2200" b="0">
-                <a:solidFill>
-                  <a:srgbClr val="111111"/>
-                </a:solidFill>
-                <a:latin typeface="Arial"/>
-              </a:rPr>
-              <a:t>3.  What is the last sentence of a strong answer?</a:t>
+              <a:rPr sz="2000" b="1">
+                <a:solidFill>
+                  <a:srgbClr val="111111"/>
+                </a:solidFill>
+                <a:latin typeface="Arial"/>
+              </a:rPr>
+              <a:t>By the end of this lesson you will be able to:</a:t>
+            </a:r>
+          </a:p>
+          <a:p>
+            <a:pPr algn="l">
+              <a:spcAft>
+                <a:spcPts val="700"/>
+              </a:spcAft>
+            </a:pPr>
+            <a:r>
+              <a:rPr sz="2000" b="0">
+                <a:solidFill>
+                  <a:srgbClr val="111111"/>
+                </a:solidFill>
+                <a:latin typeface="Arial"/>
+              </a:rPr>
+              <a:t>1.  Plan and write a timed evaluative answer using the five step method.</a:t>
+            </a:r>
+          </a:p>
+          <a:p>
+            <a:pPr algn="l">
+              <a:spcAft>
+                <a:spcPts val="700"/>
+              </a:spcAft>
+            </a:pPr>
+            <a:r>
+              <a:rPr sz="2000" b="0">
+                <a:solidFill>
+                  <a:srgbClr val="111111"/>
+                </a:solidFill>
+                <a:latin typeface="Arial"/>
+              </a:rPr>
+              <a:t>2.  Tag a peer's answer objective by objective.</a:t>
+            </a:r>
+          </a:p>
+          <a:p>
+            <a:pPr algn="l">
+              <a:spcAft>
+                <a:spcPts val="700"/>
+              </a:spcAft>
+            </a:pPr>
+            <a:r>
+              <a:rPr sz="2000" b="0">
+                <a:solidFill>
+                  <a:srgbClr val="111111"/>
+                </a:solidFill>
+                <a:latin typeface="Arial"/>
+              </a:rPr>
+              <a:t>3.  Give one specific improvement rather than a general comment.</a:t>
             </a:r>
           </a:p>
         </p:txBody>
@@ -11727,7 +11792,7 @@
                 </a:solidFill>
                 <a:latin typeface="Arial"/>
               </a:rPr>
-              <a:t>Five minutes.</a:t>
+              <a:t>Objectives</a:t>
             </a:r>
           </a:p>
         </p:txBody>
@@ -11828,7 +11893,7 @@
                 </a:solidFill>
                 <a:latin typeface="Arial"/>
               </a:rPr>
-              <a:t>DO NOW ANSWERS   |   LESSON 4</a:t>
+              <a:t>DO NOW   |   LESSON 4</a:t>
             </a:r>
           </a:p>
         </p:txBody>
@@ -11847,7 +11912,9 @@
           <a:prstGeom prst="rect">
             <a:avLst/>
           </a:prstGeom>
-          <a:noFill/>
+          <a:solidFill>
+            <a:srgbClr val="F2F2F2"/>
+          </a:solidFill>
           <a:ln w="25400">
             <a:solidFill>
               <a:srgbClr val="111111"/>
@@ -11905,45 +11972,45 @@
               </a:spcAft>
             </a:pPr>
             <a:r>
-              <a:rPr sz="1700" b="1">
-                <a:solidFill>
-                  <a:srgbClr val="111111"/>
-                </a:solidFill>
-                <a:latin typeface="Arial"/>
-              </a:rPr>
-              <a:t>1.  Decide first. Pick the criterion. Build the strongest opposing case. Weigh with a number. Attach the condition.</a:t>
-            </a:r>
-          </a:p>
-          <a:p>
-            <a:pPr algn="l">
-              <a:spcAft>
-                <a:spcPts val="700"/>
-              </a:spcAft>
-            </a:pPr>
-            <a:r>
-              <a:rPr sz="1700" b="1">
-                <a:solidFill>
-                  <a:srgbClr val="111111"/>
-                </a:solidFill>
-                <a:latin typeface="Arial"/>
-              </a:rPr>
-              <a:t>2.  In the first few sentences.</a:t>
-            </a:r>
-          </a:p>
-          <a:p>
-            <a:pPr algn="l">
-              <a:spcAft>
-                <a:spcPts val="700"/>
-              </a:spcAft>
-            </a:pPr>
-            <a:r>
-              <a:rPr sz="1700" b="1">
-                <a:solidFill>
-                  <a:srgbClr val="111111"/>
-                </a:solidFill>
-                <a:latin typeface="Arial"/>
-              </a:rPr>
-              <a:t>3.  The condition, or the action that follows from the decision.</a:t>
+              <a:rPr sz="2200" b="0">
+                <a:solidFill>
+                  <a:srgbClr val="111111"/>
+                </a:solidFill>
+                <a:latin typeface="Arial"/>
+              </a:rPr>
+              <a:t>1.  State the five steps of the method from memory.</a:t>
+            </a:r>
+          </a:p>
+          <a:p>
+            <a:pPr algn="l">
+              <a:spcAft>
+                <a:spcPts val="700"/>
+              </a:spcAft>
+            </a:pPr>
+            <a:r>
+              <a:rPr sz="2200" b="0">
+                <a:solidFill>
+                  <a:srgbClr val="111111"/>
+                </a:solidFill>
+                <a:latin typeface="Arial"/>
+              </a:rPr>
+              <a:t>2.  How early should the decision appear?</a:t>
+            </a:r>
+          </a:p>
+          <a:p>
+            <a:pPr algn="l">
+              <a:spcAft>
+                <a:spcPts val="700"/>
+              </a:spcAft>
+            </a:pPr>
+            <a:r>
+              <a:rPr sz="2200" b="0">
+                <a:solidFill>
+                  <a:srgbClr val="111111"/>
+                </a:solidFill>
+                <a:latin typeface="Arial"/>
+              </a:rPr>
+              <a:t>3.  What is the last sentence of a strong answer?</a:t>
             </a:r>
           </a:p>
         </p:txBody>
@@ -11982,7 +12049,7 @@
                 </a:solidFill>
                 <a:latin typeface="Arial"/>
               </a:rPr>
-              <a:t>Mark in green.</a:t>
+              <a:t>Five minutes.</a:t>
             </a:r>
           </a:p>
         </p:txBody>
@@ -11996,6 +12063,261 @@
 </file>
 
 <file path=ppt/slides/slide35.xml><?xml version="1.0" encoding="utf-8"?>
+<p:sld xmlns:a="http://schemas.openxmlformats.org/drawingml/2006/main" xmlns:p="http://schemas.openxmlformats.org/presentationml/2006/main" xmlns:r="http://schemas.openxmlformats.org/officeDocument/2006/relationships">
+  <p:cSld>
+    <p:spTree>
+      <p:nvGrpSpPr>
+        <p:cNvPr id="1" name=""/>
+        <p:cNvGrpSpPr/>
+        <p:nvPr/>
+      </p:nvGrpSpPr>
+      <p:grpSpPr/>
+      <p:sp>
+        <p:nvSpPr>
+          <p:cNvPr id="2" name="Rectangle 1"/>
+          <p:cNvSpPr/>
+          <p:nvPr/>
+        </p:nvSpPr>
+        <p:spPr>
+          <a:xfrm>
+            <a:off x="457200" y="365760"/>
+            <a:ext cx="11277295" cy="566928"/>
+          </a:xfrm>
+          <a:prstGeom prst="rect">
+            <a:avLst/>
+          </a:prstGeom>
+          <a:solidFill>
+            <a:srgbClr val="111111"/>
+          </a:solidFill>
+          <a:ln>
+            <a:noFill/>
+          </a:ln>
+          <a:effectLst/>
+        </p:spPr>
+        <p:style>
+          <a:lnRef idx="1">
+            <a:schemeClr val="accent1"/>
+          </a:lnRef>
+          <a:fillRef idx="3">
+            <a:schemeClr val="accent1"/>
+          </a:fillRef>
+          <a:effectRef idx="2">
+            <a:schemeClr val="accent1"/>
+          </a:effectRef>
+          <a:fontRef idx="minor">
+            <a:schemeClr val="lt1"/>
+          </a:fontRef>
+        </p:style>
+        <p:txBody>
+          <a:bodyPr rtlCol="0" anchor="ctr"/>
+          <a:lstStyle/>
+          <a:p>
+            <a:pPr algn="ctr"/>
+          </a:p>
+        </p:txBody>
+      </p:sp>
+      <p:sp>
+        <p:nvSpPr>
+          <p:cNvPr id="3" name="TextBox 2"/>
+          <p:cNvSpPr txBox="1"/>
+          <p:nvPr/>
+        </p:nvSpPr>
+        <p:spPr>
+          <a:xfrm>
+            <a:off x="658368" y="448056"/>
+            <a:ext cx="10911535" cy="566928"/>
+          </a:xfrm>
+          <a:prstGeom prst="rect">
+            <a:avLst/>
+          </a:prstGeom>
+          <a:noFill/>
+        </p:spPr>
+        <p:txBody>
+          <a:bodyPr wrap="square">
+            <a:spAutoFit/>
+          </a:bodyPr>
+          <a:lstStyle/>
+          <a:p>
+            <a:pPr algn="l">
+              <a:spcAft>
+                <a:spcPts val="700"/>
+              </a:spcAft>
+            </a:pPr>
+            <a:r>
+              <a:rPr sz="2200" b="1">
+                <a:solidFill>
+                  <a:srgbClr val="FFFFFF"/>
+                </a:solidFill>
+                <a:latin typeface="Arial"/>
+              </a:rPr>
+              <a:t>DO NOW ANSWERS   |   LESSON 4</a:t>
+            </a:r>
+          </a:p>
+        </p:txBody>
+      </p:sp>
+      <p:sp>
+        <p:nvSpPr>
+          <p:cNvPr id="4" name="Rectangle 3"/>
+          <p:cNvSpPr/>
+          <p:nvPr/>
+        </p:nvSpPr>
+        <p:spPr>
+          <a:xfrm>
+            <a:off x="640080" y="1234440"/>
+            <a:ext cx="10911535" cy="4480560"/>
+          </a:xfrm>
+          <a:prstGeom prst="rect">
+            <a:avLst/>
+          </a:prstGeom>
+          <a:noFill/>
+          <a:ln w="25400">
+            <a:solidFill>
+              <a:srgbClr val="111111"/>
+            </a:solidFill>
+          </a:ln>
+          <a:effectLst/>
+        </p:spPr>
+        <p:style>
+          <a:lnRef idx="1">
+            <a:schemeClr val="accent1"/>
+          </a:lnRef>
+          <a:fillRef idx="3">
+            <a:schemeClr val="accent1"/>
+          </a:fillRef>
+          <a:effectRef idx="2">
+            <a:schemeClr val="accent1"/>
+          </a:effectRef>
+          <a:fontRef idx="minor">
+            <a:schemeClr val="lt1"/>
+          </a:fontRef>
+        </p:style>
+        <p:txBody>
+          <a:bodyPr rtlCol="0" anchor="ctr"/>
+          <a:lstStyle/>
+          <a:p>
+            <a:pPr algn="ctr"/>
+          </a:p>
+        </p:txBody>
+      </p:sp>
+      <p:sp>
+        <p:nvSpPr>
+          <p:cNvPr id="5" name="TextBox 4"/>
+          <p:cNvSpPr txBox="1"/>
+          <p:nvPr/>
+        </p:nvSpPr>
+        <p:spPr>
+          <a:xfrm>
+            <a:off x="914400" y="1490472"/>
+            <a:ext cx="10362895" cy="4023360"/>
+          </a:xfrm>
+          <a:prstGeom prst="rect">
+            <a:avLst/>
+          </a:prstGeom>
+          <a:noFill/>
+        </p:spPr>
+        <p:txBody>
+          <a:bodyPr wrap="square">
+            <a:spAutoFit/>
+          </a:bodyPr>
+          <a:lstStyle/>
+          <a:p>
+            <a:pPr algn="l">
+              <a:spcAft>
+                <a:spcPts val="700"/>
+              </a:spcAft>
+            </a:pPr>
+            <a:r>
+              <a:rPr sz="1700" b="1">
+                <a:solidFill>
+                  <a:srgbClr val="111111"/>
+                </a:solidFill>
+                <a:latin typeface="Arial"/>
+              </a:rPr>
+              <a:t>1.  Decide first. Pick the criterion. Build the strongest opposing case. Weigh with a number. Attach the condition.</a:t>
+            </a:r>
+          </a:p>
+          <a:p>
+            <a:pPr algn="l">
+              <a:spcAft>
+                <a:spcPts val="700"/>
+              </a:spcAft>
+            </a:pPr>
+            <a:r>
+              <a:rPr sz="1700" b="1">
+                <a:solidFill>
+                  <a:srgbClr val="111111"/>
+                </a:solidFill>
+                <a:latin typeface="Arial"/>
+              </a:rPr>
+              <a:t>2.  In the first few sentences.</a:t>
+            </a:r>
+          </a:p>
+          <a:p>
+            <a:pPr algn="l">
+              <a:spcAft>
+                <a:spcPts val="700"/>
+              </a:spcAft>
+            </a:pPr>
+            <a:r>
+              <a:rPr sz="1700" b="1">
+                <a:solidFill>
+                  <a:srgbClr val="111111"/>
+                </a:solidFill>
+                <a:latin typeface="Arial"/>
+              </a:rPr>
+              <a:t>3.  The condition, or the action that follows from the decision.</a:t>
+            </a:r>
+          </a:p>
+        </p:txBody>
+      </p:sp>
+      <p:sp>
+        <p:nvSpPr>
+          <p:cNvPr id="6" name="TextBox 5"/>
+          <p:cNvSpPr txBox="1"/>
+          <p:nvPr/>
+        </p:nvSpPr>
+        <p:spPr>
+          <a:xfrm>
+            <a:off x="457200" y="6400800"/>
+            <a:ext cx="11277295" cy="365760"/>
+          </a:xfrm>
+          <a:prstGeom prst="rect">
+            <a:avLst/>
+          </a:prstGeom>
+          <a:noFill/>
+        </p:spPr>
+        <p:txBody>
+          <a:bodyPr wrap="square">
+            <a:spAutoFit/>
+          </a:bodyPr>
+          <a:lstStyle/>
+          <a:p>
+            <a:pPr algn="l">
+              <a:spcAft>
+                <a:spcPts val="700"/>
+              </a:spcAft>
+            </a:pPr>
+            <a:r>
+              <a:rPr sz="1050" b="0">
+                <a:solidFill>
+                  <a:srgbClr val="6B6B6B"/>
+                </a:solidFill>
+                <a:latin typeface="Arial"/>
+              </a:rPr>
+              <a:t>Mark in green.</a:t>
+            </a:r>
+          </a:p>
+        </p:txBody>
+      </p:sp>
+    </p:spTree>
+  </p:cSld>
+  <p:clrMapOvr>
+    <a:masterClrMapping/>
+  </p:clrMapOvr>
+</p:sld>
+</file>
+
+<file path=ppt/slides/slide36.xml><?xml version="1.0" encoding="utf-8"?>
 <p:sld xmlns:a="http://schemas.openxmlformats.org/drawingml/2006/main" xmlns:p="http://schemas.openxmlformats.org/presentationml/2006/main" xmlns:r="http://schemas.openxmlformats.org/officeDocument/2006/relationships">
   <p:cSld>
     <p:spTree>
